--- a/slides/pptx/week15.pptx
+++ b/slides/pptx/week15.pptx
@@ -22,9 +22,10 @@
     <p:sldId id="270" r:id="rId16"/>
     <p:sldId id="271" r:id="rId17"/>
     <p:sldId id="272" r:id="rId18"/>
+    <p:sldId id="273" r:id="rId19"/>
   </p:sldIdLst>
   <p:notesMasterIdLst>
-    <p:notesMasterId r:id="rId19"/>
+    <p:notesMasterId r:id="rId20"/>
   </p:notesMasterIdLst>
   <p:sldSz cx="9144000" cy="5143500"/>
   <p:notesSz cx="5143500" cy="9144000"/>
@@ -958,7 +959,7 @@
           <a:p>
             <a:r>
               <a:rPr lang="en-US" dirty="0"/>
-              <a:t>The capstone game. Both roles teach: Blue learns to configure gates, Red learns where gates have blind spots — but Red's menu is fixed to 3 attacks that actually map to a gate, not open-ended. Run it as live PRs against the pipeline. Weekly quiz Q6 asks for one gate they added + what it blocks + their personal flag — don't drop the flag half, it's graded too. ~3 min.</a:t>
+              <a:t>The capstone game. Both roles teach: Blue learns to configure gates, Red learns where gates have blind spots — but Red's menu is fixed to 3 attacks that actually map to a gate, not open-ended. Run it as live PRs against the pipeline. The weekly quiz no longer asks for the gate/what-it-blocks/flag (dropped — quiz runs before the lab) — that's required in the worksheet instead, don't drop the flag half there, it's still graded. ~3 min.</a:t>
             </a:r>
             <a:endParaRPr lang="en-US" dirty="0"/>
           </a:p>
@@ -1046,7 +1047,7 @@
           <a:p>
             <a:r>
               <a:rPr lang="en-US" dirty="0"/>
-              <a:t>Two separate targets this week, both graded: security-ci.yml is the CI gate; insecure_service.py/secure_service.py (compose, :8090/:8091) is where the personal flag lives. The "build failing" screenshots are the proof the gate actually blocks — a green pipeline that never fails is useless, and one category alone undersells the deliverable. AI-resilient tasks count. This is also the last weekly quiz.</a:t>
+              <a:t>Two separate targets this week, both graded: security-ci.yml is the CI gate; insecure_service.py/secure_service.py (compose, :8090/:8091) is where the local (public demo) flag lives; graded per-student flags come from the hosted instance. The "build failing" screenshots are the proof the gate actually blocks — a green pipeline that never fails is useless, and one category alone undersells the deliverable. AI-resilient tasks count. This is also the last weekly quiz.</a:t>
             </a:r>
             <a:endParaRPr lang="en-US" dirty="0"/>
           </a:p>
@@ -1134,7 +1135,7 @@
           <a:p>
             <a:r>
               <a:rPr lang="en-US" dirty="0"/>
-              <a:t>Recap + course wrap of the technical units. Cold-call: "why must the gate FAIL the build, not just warn?" (warnings get ignored). ~2 min.</a:t>
+              <a:t>Two separate targets this week, both graded: security-ci.yml is the CI gate; insecure_service.py/secure_service.py (compose, :8090/:8091) is where the local (public demo) flag lives; graded per-student flags come from the hosted instance. The "build failing" screenshots are the proof the gate actually blocks — a green pipeline that never fails is useless, and one category alone undersells the deliverable. AI-resilient tasks count. This is also the last weekly quiz.</a:t>
             </a:r>
             <a:endParaRPr lang="en-US" dirty="0"/>
           </a:p>
@@ -1222,7 +1223,7 @@
           <a:p>
             <a:r>
               <a:rPr lang="en-US" dirty="0"/>
-              <a:t>Wrap: "Teaching is done — next is your capstone: ship something secure, then defend it in the final CTF. Bring your project to the studio."</a:t>
+              <a:t>Recap + course wrap of the technical units. Cold-call: "why must the gate FAIL the build, not just warn?" (warnings get ignored). ~2 min.</a:t>
             </a:r>
             <a:endParaRPr lang="en-US" dirty="0"/>
           </a:p>
@@ -1246,6 +1247,94 @@
             <a:fld id="{F7021451-1387-4CA6-816F-3879F97B5CBC}" type="slidenum">
               <a:rPr lang="en-US"/>
               <a:t>17</a:t>
+            </a:fld>
+            <a:endParaRPr lang="en-US"/>
+          </a:p>
+        </p:txBody>
+      </p:sp>
+    </p:spTree>
+    <p:extLst>
+      <p:ext uri="{BB962C8B-B14F-4D97-AF65-F5344CB8AC3E}">
+        <p14:creationId xmlns:p14="http://schemas.microsoft.com/office/powerpoint/2010/main" val="1024086991"/>
+      </p:ext>
+    </p:extLst>
+  </p:cSld>
+  <p:clrMapOvr>
+    <a:masterClrMapping/>
+  </p:clrMapOvr>
+</p:notes>
+</file>
+
+<file path=ppt/notesSlides/notesSlide18.xml><?xml version="1.0" encoding="utf-8"?>
+<p:notes xmlns:a="http://schemas.openxmlformats.org/drawingml/2006/main" xmlns:r="http://schemas.openxmlformats.org/officeDocument/2006/relationships" xmlns:p="http://schemas.openxmlformats.org/presentationml/2006/main">
+  <p:cSld>
+    <p:spTree>
+      <p:nvGrpSpPr>
+        <p:cNvPr id="1" name=""/>
+        <p:cNvGrpSpPr/>
+        <p:nvPr/>
+      </p:nvGrpSpPr>
+      <p:grpSpPr>
+        <a:xfrm>
+          <a:off x="0" y="0"/>
+          <a:ext cx="0" cy="0"/>
+          <a:chOff x="0" y="0"/>
+          <a:chExt cx="0" cy="0"/>
+        </a:xfrm>
+      </p:grpSpPr>
+      <p:sp>
+        <p:nvSpPr>
+          <p:cNvPr id="2" name="Slide Image Placeholder 1"/>
+          <p:cNvSpPr>
+            <a:spLocks noGrp="1" noRot="1" noChangeAspect="1"/>
+          </p:cNvSpPr>
+          <p:nvPr>
+            <p:ph type="sldImg"/>
+          </p:nvPr>
+        </p:nvSpPr>
+        <p:spPr/>
+      </p:sp>
+      <p:sp>
+        <p:nvSpPr>
+          <p:cNvPr id="3" name="Notes Placeholder 2"/>
+          <p:cNvSpPr>
+            <a:spLocks noGrp="1"/>
+          </p:cNvSpPr>
+          <p:nvPr>
+            <p:ph type="body" idx="1"/>
+          </p:nvPr>
+        </p:nvSpPr>
+        <p:spPr/>
+        <p:txBody>
+          <a:bodyPr/>
+          <a:lstStyle/>
+          <a:p>
+            <a:r>
+              <a:rPr lang="en-US" dirty="0"/>
+              <a:t>Wrap: "Teaching is done — next is your capstone: ship something secure, then defend it in the final CTF. Bring your project to the studio."</a:t>
+            </a:r>
+            <a:endParaRPr lang="en-US" dirty="0"/>
+          </a:p>
+        </p:txBody>
+      </p:sp>
+      <p:sp>
+        <p:nvSpPr>
+          <p:cNvPr id="4" name="Slide Number Placeholder 3"/>
+          <p:cNvSpPr>
+            <a:spLocks noGrp="1"/>
+          </p:cNvSpPr>
+          <p:nvPr>
+            <p:ph type="sldNum" sz="quarter" idx="10"/>
+          </p:nvPr>
+        </p:nvSpPr>
+        <p:spPr/>
+        <p:txBody>
+          <a:bodyPr/>
+          <a:lstStyle/>
+          <a:p>
+            <a:fld id="{F7021451-1387-4CA6-816F-3879F97B5CBC}" type="slidenum">
+              <a:rPr lang="en-US"/>
+              <a:t>18</a:t>
             </a:fld>
             <a:endParaRPr lang="en-US"/>
           </a:p>
@@ -3723,11 +3812,11 @@
         <p:spPr>
           <a:xfrm>
             <a:off x="457200" y="1325880"/>
-            <a:ext cx="8229600" cy="2011680"/>
+            <a:ext cx="8229600" cy="2212848"/>
           </a:xfrm>
           <a:prstGeom prst="roundRect">
             <a:avLst>
-              <a:gd name="adj" fmla="val 3636"/>
+              <a:gd name="adj" fmla="val 3306"/>
             </a:avLst>
           </a:prstGeom>
           <a:solidFill>
@@ -3752,7 +3841,7 @@
         <p:spPr>
           <a:xfrm>
             <a:off x="731520" y="1435608"/>
-            <a:ext cx="7680960" cy="1792224"/>
+            <a:ext cx="7680960" cy="1993392"/>
           </a:xfrm>
           <a:prstGeom prst="rect">
             <a:avLst/>
@@ -3824,7 +3913,7 @@
                 <a:ea typeface="Calibri" pitchFamily="34" charset="-122"/>
                 <a:cs typeface="Calibri" pitchFamily="34" charset="-120"/>
               </a:rPr>
-              <a:t>Score: Blue per catch, Red per successful bypass; then capture your personal flag from the fail-open /admin bypass in insecure_service.py</a:t>
+              <a:t>Score: Blue per catch, Red per successful bypass; then leak the flag from the fail-open /admin bypass in insecure_service.py (a public demo value on a local run; your personal flag comes from your hosted instance)</a:t>
             </a:r>
             <a:endParaRPr lang="en-US" sz="1400" dirty="0"/>
           </a:p>
@@ -4087,11 +4176,11 @@
         <p:spPr>
           <a:xfrm>
             <a:off x="457200" y="2587752"/>
-            <a:ext cx="8229600" cy="1920240"/>
+            <a:ext cx="8229600" cy="1810512"/>
           </a:xfrm>
           <a:prstGeom prst="roundRect">
             <a:avLst>
-              <a:gd name="adj" fmla="val 3810"/>
+              <a:gd name="adj" fmla="val 4040"/>
             </a:avLst>
           </a:prstGeom>
           <a:solidFill>
@@ -4116,7 +4205,7 @@
         <p:spPr>
           <a:xfrm>
             <a:off x="731520" y="2697480"/>
-            <a:ext cx="7680960" cy="1700784"/>
+            <a:ext cx="7680960" cy="1591056"/>
           </a:xfrm>
           <a:prstGeom prst="rect">
             <a:avLst/>
@@ -4188,28 +4277,7 @@
                 <a:ea typeface="Calibri" pitchFamily="34" charset="-122"/>
                 <a:cs typeface="Calibri" pitchFamily="34" charset="-120"/>
               </a:rPr>
-              <a:t>Your personal FLAG{...} from the fail-open /admin bypass, submitted with this week's quiz Q6</a:t>
-            </a:r>
-            <a:endParaRPr lang="en-US" sz="1400" dirty="0"/>
-          </a:p>
-          <a:p>
-            <a:pPr marL="342900" indent="-342900">
-              <a:spcAft>
-                <a:spcPts val="600"/>
-              </a:spcAft>
-              <a:buSzPct val="100000"/>
-              <a:buChar char="•"/>
-            </a:pPr>
-            <a:r>
-              <a:rPr lang="en-US" sz="1400" dirty="0">
-                <a:solidFill>
-                  <a:srgbClr val="1F2937"/>
-                </a:solidFill>
-                <a:latin typeface="Calibri" pitchFamily="34" charset="0"/>
-                <a:ea typeface="Calibri" pitchFamily="34" charset="-122"/>
-                <a:cs typeface="Calibri" pitchFamily="34" charset="-120"/>
-              </a:rPr>
-              <a:t>+ Audit the AI / EiPE / Prompt Problem (see worksheet)</a:t>
+              <a:t>The FLAG{...} from the fail-open /admin bypass, in the worksheet (not the weekly quiz, which runs before the lab); your personal flag comes from your hosted instance</a:t>
             </a:r>
             <a:endParaRPr lang="en-US" sz="1400" dirty="0"/>
           </a:p>
@@ -4394,7 +4462,7 @@
                 <a:ea typeface="Arial" pitchFamily="34" charset="-122"/>
                 <a:cs typeface="Arial" pitchFamily="34" charset="-120"/>
               </a:rPr>
-              <a:t>Key takeaways</a:t>
+              <a:t>Deliverable (cont.)</a:t>
             </a:r>
             <a:endParaRPr lang="en-US" sz="2600" dirty="0"/>
           </a:p>
@@ -4409,11 +4477,11 @@
         <p:spPr>
           <a:xfrm>
             <a:off x="457200" y="1325880"/>
-            <a:ext cx="8229600" cy="1207008"/>
+            <a:ext cx="8229600" cy="585216"/>
           </a:xfrm>
           <a:prstGeom prst="roundRect">
             <a:avLst>
-              <a:gd name="adj" fmla="val 6061"/>
+              <a:gd name="adj" fmla="val 12500"/>
             </a:avLst>
           </a:prstGeom>
           <a:solidFill>
@@ -4438,7 +4506,7 @@
         <p:spPr>
           <a:xfrm>
             <a:off x="731520" y="1435608"/>
-            <a:ext cx="7680960" cy="987552"/>
+            <a:ext cx="7680960" cy="365760"/>
           </a:xfrm>
           <a:prstGeom prst="rect">
             <a:avLst/>
@@ -4468,49 +4536,7 @@
                 <a:ea typeface="Calibri" pitchFamily="34" charset="-122"/>
                 <a:cs typeface="Calibri" pitchFamily="34" charset="-120"/>
               </a:rPr>
-              <a:t>Automate security gates — humans forget, pipelines don't</a:t>
-            </a:r>
-            <a:endParaRPr lang="en-US" sz="1400" dirty="0"/>
-          </a:p>
-          <a:p>
-            <a:pPr marL="342900" indent="-342900">
-              <a:spcAft>
-                <a:spcPts val="600"/>
-              </a:spcAft>
-              <a:buSzPct val="100000"/>
-              <a:buChar char="•"/>
-            </a:pPr>
-            <a:r>
-              <a:rPr lang="en-US" sz="1400" dirty="0">
-                <a:solidFill>
-                  <a:srgbClr val="1F2937"/>
-                </a:solidFill>
-                <a:latin typeface="Calibri" pitchFamily="34" charset="0"/>
-                <a:ea typeface="Calibri" pitchFamily="34" charset="-122"/>
-                <a:cs typeface="Calibri" pitchFamily="34" charset="-120"/>
-              </a:rPr>
-              <a:t>You can't defend what you don't log</a:t>
-            </a:r>
-            <a:endParaRPr lang="en-US" sz="1400" dirty="0"/>
-          </a:p>
-          <a:p>
-            <a:pPr marL="342900" indent="-342900">
-              <a:spcAft>
-                <a:spcPts val="600"/>
-              </a:spcAft>
-              <a:buSzPct val="100000"/>
-              <a:buChar char="•"/>
-            </a:pPr>
-            <a:r>
-              <a:rPr lang="en-US" sz="1400" dirty="0">
-                <a:solidFill>
-                  <a:srgbClr val="1F2937"/>
-                </a:solidFill>
-                <a:latin typeface="Calibri" pitchFamily="34" charset="0"/>
-                <a:ea typeface="Calibri" pitchFamily="34" charset="-122"/>
-                <a:cs typeface="Calibri" pitchFamily="34" charset="-120"/>
-              </a:rPr>
-              <a:t>Fail closed; disclose responsibly</a:t>
+              <a:t>+ Audit the AI / EiPE / Prompt Problem (see worksheet)</a:t>
             </a:r>
             <a:endParaRPr lang="en-US" sz="1400" dirty="0"/>
           </a:p>
@@ -4590,6 +4616,307 @@
 <file path=ppt/slides/slide17.xml><?xml version="1.0" encoding="utf-8"?>
 <p:sld xmlns:a="http://schemas.openxmlformats.org/drawingml/2006/main" xmlns:r="http://schemas.openxmlformats.org/officeDocument/2006/relationships" xmlns:p="http://schemas.openxmlformats.org/presentationml/2006/main">
   <p:cSld name="Slide 17">
+    <p:bg>
+      <p:bgPr>
+        <a:solidFill>
+          <a:srgbClr val="FFFFFF"/>
+        </a:solidFill>
+      </p:bgPr>
+    </p:bg>
+    <p:spTree>
+      <p:nvGrpSpPr>
+        <p:cNvPr id="1" name=""/>
+        <p:cNvGrpSpPr/>
+        <p:nvPr/>
+      </p:nvGrpSpPr>
+      <p:grpSpPr>
+        <a:xfrm>
+          <a:off x="0" y="0"/>
+          <a:ext cx="0" cy="0"/>
+          <a:chOff x="0" y="0"/>
+          <a:chExt cx="0" cy="0"/>
+        </a:xfrm>
+      </p:grpSpPr>
+      <p:sp>
+        <p:nvSpPr>
+          <p:cNvPr id="2" name="Shape 0"/>
+          <p:cNvSpPr/>
+          <p:nvPr/>
+        </p:nvSpPr>
+        <p:spPr>
+          <a:xfrm>
+            <a:off x="457200" y="384048"/>
+            <a:ext cx="530352" cy="530352"/>
+          </a:xfrm>
+          <a:prstGeom prst="ellipse">
+            <a:avLst/>
+          </a:prstGeom>
+          <a:solidFill>
+            <a:srgbClr val="E35205"/>
+          </a:solidFill>
+          <a:ln/>
+          <a:effectLst>
+            <a:outerShdw sx="100000" sy="100000" kx="0" ky="0" algn="bl" rotWithShape="0" blurRad="76200" dist="25400" dir="5400000">
+              <a:srgbClr val="000000">
+                <a:alpha val="12000"/>
+              </a:srgbClr>
+            </a:outerShdw>
+          </a:effectLst>
+        </p:spPr>
+      </p:sp>
+      <p:pic>
+        <p:nvPicPr>
+          <p:cNvPr id="3" name="Image 0" descr="preencoded.png">    </p:cNvPr>
+          <p:cNvPicPr>
+            <a:picLocks noChangeAspect="1"/>
+          </p:cNvPicPr>
+          <p:nvPr/>
+        </p:nvPicPr>
+        <p:blipFill>
+          <a:blip r:embed="rId1"/>
+          <a:stretch>
+            <a:fillRect/>
+          </a:stretch>
+        </p:blipFill>
+        <p:spPr>
+          <a:xfrm>
+            <a:off x="594360" y="521208"/>
+            <a:ext cx="256032" cy="256032"/>
+          </a:xfrm>
+          <a:prstGeom prst="rect">
+            <a:avLst/>
+          </a:prstGeom>
+        </p:spPr>
+      </p:pic>
+      <p:sp>
+        <p:nvSpPr>
+          <p:cNvPr id="4" name="Text 1"/>
+          <p:cNvSpPr/>
+          <p:nvPr/>
+        </p:nvSpPr>
+        <p:spPr>
+          <a:xfrm>
+            <a:off x="1143000" y="329184"/>
+            <a:ext cx="7498080" cy="603504"/>
+          </a:xfrm>
+          <a:prstGeom prst="rect">
+            <a:avLst/>
+          </a:prstGeom>
+          <a:noFill/>
+          <a:ln/>
+        </p:spPr>
+        <p:txBody>
+          <a:bodyPr wrap="square" lIns="0" tIns="0" rIns="0" bIns="0" rtlCol="0" anchor="ctr"/>
+          <a:lstStyle/>
+          <a:p>
+            <a:pPr indent="0" marL="0">
+              <a:buNone/>
+            </a:pPr>
+            <a:r>
+              <a:rPr lang="en-US" sz="2600" b="1" dirty="0">
+                <a:solidFill>
+                  <a:srgbClr val="1F2937"/>
+                </a:solidFill>
+                <a:latin typeface="Arial" pitchFamily="34" charset="0"/>
+                <a:ea typeface="Arial" pitchFamily="34" charset="-122"/>
+                <a:cs typeface="Arial" pitchFamily="34" charset="-120"/>
+              </a:rPr>
+              <a:t>Key takeaways</a:t>
+            </a:r>
+            <a:endParaRPr lang="en-US" sz="2600" dirty="0"/>
+          </a:p>
+        </p:txBody>
+      </p:sp>
+      <p:sp>
+        <p:nvSpPr>
+          <p:cNvPr id="5" name="Shape 2"/>
+          <p:cNvSpPr/>
+          <p:nvPr/>
+        </p:nvSpPr>
+        <p:spPr>
+          <a:xfrm>
+            <a:off x="457200" y="1325880"/>
+            <a:ext cx="8229600" cy="1207008"/>
+          </a:xfrm>
+          <a:prstGeom prst="roundRect">
+            <a:avLst>
+              <a:gd name="adj" fmla="val 6061"/>
+            </a:avLst>
+          </a:prstGeom>
+          <a:solidFill>
+            <a:srgbClr val="F1F5F9"/>
+          </a:solidFill>
+          <a:ln/>
+          <a:effectLst>
+            <a:outerShdw sx="100000" sy="100000" kx="0" ky="0" algn="bl" rotWithShape="0" blurRad="76200" dist="25400" dir="5400000">
+              <a:srgbClr val="000000">
+                <a:alpha val="12000"/>
+              </a:srgbClr>
+            </a:outerShdw>
+          </a:effectLst>
+        </p:spPr>
+      </p:sp>
+      <p:sp>
+        <p:nvSpPr>
+          <p:cNvPr id="6" name="Text 3"/>
+          <p:cNvSpPr/>
+          <p:nvPr/>
+        </p:nvSpPr>
+        <p:spPr>
+          <a:xfrm>
+            <a:off x="731520" y="1435608"/>
+            <a:ext cx="7680960" cy="987552"/>
+          </a:xfrm>
+          <a:prstGeom prst="rect">
+            <a:avLst/>
+          </a:prstGeom>
+          <a:noFill/>
+          <a:ln/>
+        </p:spPr>
+        <p:txBody>
+          <a:bodyPr wrap="square" lIns="0" tIns="0" rIns="0" bIns="0" rtlCol="0" anchor="t">
+            <a:normAutofit/>
+          </a:bodyPr>
+          <a:lstStyle/>
+          <a:p>
+            <a:pPr marL="342900" indent="-342900">
+              <a:spcAft>
+                <a:spcPts val="600"/>
+              </a:spcAft>
+              <a:buSzPct val="100000"/>
+              <a:buChar char="•"/>
+            </a:pPr>
+            <a:r>
+              <a:rPr lang="en-US" sz="1400" dirty="0">
+                <a:solidFill>
+                  <a:srgbClr val="1F2937"/>
+                </a:solidFill>
+                <a:latin typeface="Calibri" pitchFamily="34" charset="0"/>
+                <a:ea typeface="Calibri" pitchFamily="34" charset="-122"/>
+                <a:cs typeface="Calibri" pitchFamily="34" charset="-120"/>
+              </a:rPr>
+              <a:t>Automate security gates — humans forget, pipelines don't</a:t>
+            </a:r>
+            <a:endParaRPr lang="en-US" sz="1400" dirty="0"/>
+          </a:p>
+          <a:p>
+            <a:pPr marL="342900" indent="-342900">
+              <a:spcAft>
+                <a:spcPts val="600"/>
+              </a:spcAft>
+              <a:buSzPct val="100000"/>
+              <a:buChar char="•"/>
+            </a:pPr>
+            <a:r>
+              <a:rPr lang="en-US" sz="1400" dirty="0">
+                <a:solidFill>
+                  <a:srgbClr val="1F2937"/>
+                </a:solidFill>
+                <a:latin typeface="Calibri" pitchFamily="34" charset="0"/>
+                <a:ea typeface="Calibri" pitchFamily="34" charset="-122"/>
+                <a:cs typeface="Calibri" pitchFamily="34" charset="-120"/>
+              </a:rPr>
+              <a:t>You can't defend what you don't log</a:t>
+            </a:r>
+            <a:endParaRPr lang="en-US" sz="1400" dirty="0"/>
+          </a:p>
+          <a:p>
+            <a:pPr marL="342900" indent="-342900">
+              <a:spcAft>
+                <a:spcPts val="600"/>
+              </a:spcAft>
+              <a:buSzPct val="100000"/>
+              <a:buChar char="•"/>
+            </a:pPr>
+            <a:r>
+              <a:rPr lang="en-US" sz="1400" dirty="0">
+                <a:solidFill>
+                  <a:srgbClr val="1F2937"/>
+                </a:solidFill>
+                <a:latin typeface="Calibri" pitchFamily="34" charset="0"/>
+                <a:ea typeface="Calibri" pitchFamily="34" charset="-122"/>
+                <a:cs typeface="Calibri" pitchFamily="34" charset="-120"/>
+              </a:rPr>
+              <a:t>Fail closed; disclose responsibly</a:t>
+            </a:r>
+            <a:endParaRPr lang="en-US" sz="1400" dirty="0"/>
+          </a:p>
+        </p:txBody>
+      </p:sp>
+      <p:sp>
+        <p:nvSpPr>
+          <p:cNvPr id="7" name="Text 4"/>
+          <p:cNvSpPr/>
+          <p:nvPr/>
+        </p:nvSpPr>
+        <p:spPr>
+          <a:xfrm>
+            <a:off x="457200" y="4800600"/>
+            <a:ext cx="6949440" cy="274320"/>
+          </a:xfrm>
+          <a:prstGeom prst="rect">
+            <a:avLst/>
+          </a:prstGeom>
+          <a:noFill/>
+          <a:ln/>
+        </p:spPr>
+        <p:txBody>
+          <a:bodyPr wrap="square" lIns="0" tIns="0" rIns="0" bIns="0" rtlCol="0" anchor="ctr"/>
+          <a:lstStyle/>
+          <a:p>
+            <a:pPr indent="0" marL="0">
+              <a:buNone/>
+            </a:pPr>
+            <a:r>
+              <a:rPr lang="en-US" sz="900" dirty="0">
+                <a:solidFill>
+                  <a:srgbClr val="64748B"/>
+                </a:solidFill>
+                <a:latin typeface="Calibri" pitchFamily="34" charset="0"/>
+                <a:ea typeface="Calibri" pitchFamily="34" charset="-122"/>
+                <a:cs typeface="Calibri" pitchFamily="34" charset="-120"/>
+              </a:rPr>
+              <a:t>Software Security · Week 15</a:t>
+            </a:r>
+            <a:endParaRPr lang="en-US" sz="900" dirty="0"/>
+          </a:p>
+        </p:txBody>
+      </p:sp>
+      <p:pic>
+        <p:nvPicPr>
+          <p:cNvPr id="8" name="Image 1" descr="/Users/pop7/Library/CloudStorage/OneDrive-MonsterConnectCo.,Ltd/Lecture/KOSEN69 - software-security/slides/pptx/assets/logo-small.png">    </p:cNvPr>
+          <p:cNvPicPr>
+            <a:picLocks noChangeAspect="1"/>
+          </p:cNvPicPr>
+          <p:nvPr/>
+        </p:nvPicPr>
+        <p:blipFill>
+          <a:blip r:embed="rId2"/>
+          <a:stretch>
+            <a:fillRect/>
+          </a:stretch>
+        </p:blipFill>
+        <p:spPr>
+          <a:xfrm>
+            <a:off x="7882128" y="4700016"/>
+            <a:ext cx="768096" cy="356616"/>
+          </a:xfrm>
+          <a:prstGeom prst="rect">
+            <a:avLst/>
+          </a:prstGeom>
+        </p:spPr>
+      </p:pic>
+    </p:spTree>
+  </p:cSld>
+  <p:clrMapOvr>
+    <a:masterClrMapping/>
+  </p:clrMapOvr>
+</p:sld>
+</file>
+
+<file path=ppt/slides/slide18.xml><?xml version="1.0" encoding="utf-8"?>
+<p:sld xmlns:a="http://schemas.openxmlformats.org/drawingml/2006/main" xmlns:r="http://schemas.openxmlformats.org/officeDocument/2006/relationships" xmlns:p="http://schemas.openxmlformats.org/presentationml/2006/main">
+  <p:cSld name="Slide 18">
     <p:bg>
       <p:bgPr>
         <a:solidFill>
